--- a/Proj Inf_EI_Poster_A3_SmartTraffic.pptx
+++ b/Proj Inf_EI_Poster_A3_SmartTraffic.pptx
@@ -3450,7 +3450,7 @@
         </p:nvSpPr>
         <p:spPr>
           <a:xfrm>
-            <a:off x="6692192" y="2446409"/>
+            <a:off x="153319" y="2418666"/>
             <a:ext cx="6073776" cy="1346079"/>
           </a:xfrm>
         </p:spPr>
@@ -3534,7 +3534,7 @@
         </p:blipFill>
         <p:spPr>
           <a:xfrm>
-            <a:off x="7542473" y="3853876"/>
+            <a:off x="1003600" y="3798575"/>
             <a:ext cx="3909342" cy="2602908"/>
           </a:xfrm>
         </p:spPr>
@@ -3773,7 +3773,7 @@
         </p:nvSpPr>
         <p:spPr>
           <a:xfrm>
-            <a:off x="639762" y="662548"/>
+            <a:off x="639762" y="624136"/>
             <a:ext cx="11522075" cy="1600200"/>
           </a:xfrm>
         </p:spPr>
@@ -3803,7 +3803,7 @@
         </p:nvSpPr>
         <p:spPr>
           <a:xfrm>
-            <a:off x="6692192" y="1920280"/>
+            <a:off x="153319" y="1848272"/>
             <a:ext cx="3801213" cy="461665"/>
           </a:xfrm>
           <a:prstGeom prst="rect">
@@ -3860,7 +3860,7 @@
         </p:nvSpPr>
         <p:spPr>
           <a:xfrm>
-            <a:off x="208112" y="1920280"/>
+            <a:off x="6400799" y="1848271"/>
             <a:ext cx="4672608" cy="461665"/>
           </a:xfrm>
           <a:prstGeom prst="rect">
@@ -3908,7 +3908,7 @@
         </p:nvSpPr>
         <p:spPr>
           <a:xfrm>
-            <a:off x="208110" y="2446409"/>
+            <a:off x="6400799" y="2418666"/>
             <a:ext cx="5842995" cy="2062103"/>
           </a:xfrm>
           <a:prstGeom prst="rect">
@@ -3980,7 +3980,7 @@
         </p:blipFill>
         <p:spPr>
           <a:xfrm>
-            <a:off x="658152" y="4573956"/>
+            <a:off x="6732332" y="4774840"/>
             <a:ext cx="5017655" cy="2602908"/>
           </a:xfrm>
           <a:prstGeom prst="rect">
@@ -4122,7 +4122,7 @@
         </p:nvSpPr>
         <p:spPr>
           <a:xfrm>
-            <a:off x="203200" y="7450087"/>
+            <a:off x="176634" y="6603815"/>
             <a:ext cx="3801213" cy="461665"/>
           </a:xfrm>
           <a:prstGeom prst="rect">
@@ -4165,8 +4165,8 @@
         </p:nvSpPr>
         <p:spPr bwMode="auto">
           <a:xfrm>
-            <a:off x="155574" y="7901031"/>
-            <a:ext cx="12293897" cy="860009"/>
+            <a:off x="167973" y="7077515"/>
+            <a:ext cx="5901296" cy="1600200"/>
           </a:xfrm>
           <a:prstGeom prst="rect">
             <a:avLst/>
@@ -4371,16 +4371,36 @@
             </a:lvl9pPr>
           </a:lstStyle>
           <a:p>
-            <a:pPr marL="0" indent="0">
+            <a:pPr>
               <a:buClr>
                 <a:srgbClr val="D45500"/>
               </a:buClr>
-              <a:buFontTx/>
-              <a:buNone/>
             </a:pPr>
             <a:r>
               <a:rPr lang="pt-PT" sz="1600" dirty="0"/>
-              <a:t>Como previsto, a finalidade deste projeto foi alcançada pois este é capaz de detetar e analisar veículos de forma automática, extraindo dados estatísticos relevantes e apresenta-los numa interface intuitiva. O sistema revelou ser escalável e com potencial de aplicação em cenários reais de gestão e monitorização de tráfego urbano.</a:t>
+              <a:t>Deteção e analise de forma automática de veículos com extração de dados estatísticos relevantes;</a:t>
+            </a:r>
+          </a:p>
+          <a:p>
+            <a:pPr>
+              <a:buClr>
+                <a:srgbClr val="D45500"/>
+              </a:buClr>
+            </a:pPr>
+            <a:r>
+              <a:rPr lang="pt-PT" sz="1600" dirty="0"/>
+              <a:t>Visualização numa interface web intuitiva;</a:t>
+            </a:r>
+          </a:p>
+          <a:p>
+            <a:pPr>
+              <a:buClr>
+                <a:srgbClr val="D45500"/>
+              </a:buClr>
+            </a:pPr>
+            <a:r>
+              <a:rPr lang="pt-PT" sz="1600" dirty="0"/>
+              <a:t>Sistema escalável, com potencial de aplicação real na gestão tráfego urbano;</a:t>
             </a:r>
           </a:p>
         </p:txBody>
